--- a/public/icons/event/source terrain.pptx
+++ b/public/icons/event/source terrain.pptx
@@ -6,6 +6,7 @@
   </p:sldMasterIdLst>
   <p:sldIdLst>
     <p:sldId id="257" r:id="rId2"/>
+    <p:sldId id="258" r:id="rId3"/>
   </p:sldIdLst>
   <p:sldSz cx="12192000" cy="6858000"/>
   <p:notesSz cx="6858000" cy="9144000"/>
@@ -4787,6 +4788,360 @@
     <p:extLst>
       <p:ext uri="{BB962C8B-B14F-4D97-AF65-F5344CB8AC3E}">
         <p14:creationId xmlns:p14="http://schemas.microsoft.com/office/powerpoint/2010/main" val="2933205495"/>
+      </p:ext>
+    </p:extLst>
+  </p:cSld>
+  <p:clrMapOvr>
+    <a:masterClrMapping/>
+  </p:clrMapOvr>
+</p:sld>
+</file>
+
+<file path=ppt/slides/slide2.xml><?xml version="1.0" encoding="utf-8"?>
+<p:sld xmlns:a="http://schemas.openxmlformats.org/drawingml/2006/main" xmlns:r="http://schemas.openxmlformats.org/officeDocument/2006/relationships" xmlns:p="http://schemas.openxmlformats.org/presentationml/2006/main">
+  <p:cSld>
+    <p:spTree>
+      <p:nvGrpSpPr>
+        <p:cNvPr id="1" name=""/>
+        <p:cNvGrpSpPr/>
+        <p:nvPr/>
+      </p:nvGrpSpPr>
+      <p:grpSpPr>
+        <a:xfrm>
+          <a:off x="0" y="0"/>
+          <a:ext cx="0" cy="0"/>
+          <a:chOff x="0" y="0"/>
+          <a:chExt cx="0" cy="0"/>
+        </a:xfrm>
+      </p:grpSpPr>
+      <p:sp>
+        <p:nvSpPr>
+          <p:cNvPr id="3" name="ZoneTexte 2">
+            <a:extLst>
+              <a:ext uri="{FF2B5EF4-FFF2-40B4-BE49-F238E27FC236}">
+                <a16:creationId xmlns:a16="http://schemas.microsoft.com/office/drawing/2014/main" id="{2B36F27C-9DCC-6BA3-C071-5C267502465F}"/>
+              </a:ext>
+            </a:extLst>
+          </p:cNvPr>
+          <p:cNvSpPr txBox="1"/>
+          <p:nvPr/>
+        </p:nvSpPr>
+        <p:spPr>
+          <a:xfrm>
+            <a:off x="1866507" y="754144"/>
+            <a:ext cx="810705" cy="1446550"/>
+          </a:xfrm>
+          <a:prstGeom prst="rect">
+            <a:avLst/>
+          </a:prstGeom>
+          <a:noFill/>
+        </p:spPr>
+        <p:txBody>
+          <a:bodyPr wrap="square" rtlCol="0">
+            <a:spAutoFit/>
+          </a:bodyPr>
+          <a:lstStyle/>
+          <a:p>
+            <a:r>
+              <a:rPr lang="fr-FR" sz="8800" b="1" dirty="0"/>
+              <a:t>1</a:t>
+            </a:r>
+          </a:p>
+        </p:txBody>
+      </p:sp>
+      <p:sp>
+        <p:nvSpPr>
+          <p:cNvPr id="4" name="Flèche : droite 3">
+            <a:extLst>
+              <a:ext uri="{FF2B5EF4-FFF2-40B4-BE49-F238E27FC236}">
+                <a16:creationId xmlns:a16="http://schemas.microsoft.com/office/drawing/2014/main" id="{01461DC0-9C05-4D1C-1FCA-206D71D1C43F}"/>
+              </a:ext>
+            </a:extLst>
+          </p:cNvPr>
+          <p:cNvSpPr/>
+          <p:nvPr/>
+        </p:nvSpPr>
+        <p:spPr>
+          <a:xfrm>
+            <a:off x="2601797" y="1175761"/>
+            <a:ext cx="810705" cy="603316"/>
+          </a:xfrm>
+          <a:prstGeom prst="rightArrow">
+            <a:avLst/>
+          </a:prstGeom>
+        </p:spPr>
+        <p:style>
+          <a:lnRef idx="2">
+            <a:schemeClr val="accent1">
+              <a:shade val="15000"/>
+            </a:schemeClr>
+          </a:lnRef>
+          <a:fillRef idx="1">
+            <a:schemeClr val="accent1"/>
+          </a:fillRef>
+          <a:effectRef idx="0">
+            <a:schemeClr val="accent1"/>
+          </a:effectRef>
+          <a:fontRef idx="minor">
+            <a:schemeClr val="lt1"/>
+          </a:fontRef>
+        </p:style>
+        <p:txBody>
+          <a:bodyPr rtlCol="0" anchor="ctr"/>
+          <a:lstStyle/>
+          <a:p>
+            <a:pPr algn="ctr"/>
+            <a:endParaRPr lang="fr-FR"/>
+          </a:p>
+        </p:txBody>
+      </p:sp>
+      <p:sp>
+        <p:nvSpPr>
+          <p:cNvPr id="6" name="ZoneTexte 5">
+            <a:extLst>
+              <a:ext uri="{FF2B5EF4-FFF2-40B4-BE49-F238E27FC236}">
+                <a16:creationId xmlns:a16="http://schemas.microsoft.com/office/drawing/2014/main" id="{66E18CB2-E448-0B39-DD23-2609CE33DFBF}"/>
+              </a:ext>
+            </a:extLst>
+          </p:cNvPr>
+          <p:cNvSpPr txBox="1"/>
+          <p:nvPr/>
+        </p:nvSpPr>
+        <p:spPr>
+          <a:xfrm>
+            <a:off x="6675748" y="754144"/>
+            <a:ext cx="810705" cy="1446550"/>
+          </a:xfrm>
+          <a:prstGeom prst="rect">
+            <a:avLst/>
+          </a:prstGeom>
+          <a:noFill/>
+        </p:spPr>
+        <p:txBody>
+          <a:bodyPr wrap="square" rtlCol="0">
+            <a:spAutoFit/>
+          </a:bodyPr>
+          <a:lstStyle/>
+          <a:p>
+            <a:r>
+              <a:rPr lang="fr-FR" sz="8800" b="1" dirty="0"/>
+              <a:t>1</a:t>
+            </a:r>
+          </a:p>
+        </p:txBody>
+      </p:sp>
+      <p:sp>
+        <p:nvSpPr>
+          <p:cNvPr id="8" name="Flèche : droite 7">
+            <a:extLst>
+              <a:ext uri="{FF2B5EF4-FFF2-40B4-BE49-F238E27FC236}">
+                <a16:creationId xmlns:a16="http://schemas.microsoft.com/office/drawing/2014/main" id="{D0569071-FF1E-5884-C515-572050850C5D}"/>
+              </a:ext>
+            </a:extLst>
+          </p:cNvPr>
+          <p:cNvSpPr/>
+          <p:nvPr/>
+        </p:nvSpPr>
+        <p:spPr>
+          <a:xfrm>
+            <a:off x="5968737" y="1175761"/>
+            <a:ext cx="810705" cy="603316"/>
+          </a:xfrm>
+          <a:prstGeom prst="rightArrow">
+            <a:avLst/>
+          </a:prstGeom>
+        </p:spPr>
+        <p:style>
+          <a:lnRef idx="2">
+            <a:schemeClr val="accent1">
+              <a:shade val="15000"/>
+            </a:schemeClr>
+          </a:lnRef>
+          <a:fillRef idx="1">
+            <a:schemeClr val="accent1"/>
+          </a:fillRef>
+          <a:effectRef idx="0">
+            <a:schemeClr val="accent1"/>
+          </a:effectRef>
+          <a:fontRef idx="minor">
+            <a:schemeClr val="lt1"/>
+          </a:fontRef>
+        </p:style>
+        <p:txBody>
+          <a:bodyPr rtlCol="0" anchor="ctr"/>
+          <a:lstStyle/>
+          <a:p>
+            <a:pPr algn="ctr"/>
+            <a:endParaRPr lang="fr-FR"/>
+          </a:p>
+        </p:txBody>
+      </p:sp>
+      <p:sp>
+        <p:nvSpPr>
+          <p:cNvPr id="10" name="ZoneTexte 9">
+            <a:extLst>
+              <a:ext uri="{FF2B5EF4-FFF2-40B4-BE49-F238E27FC236}">
+                <a16:creationId xmlns:a16="http://schemas.microsoft.com/office/drawing/2014/main" id="{F79CAB4A-6581-D9EF-F028-1304ED977FE1}"/>
+              </a:ext>
+            </a:extLst>
+          </p:cNvPr>
+          <p:cNvSpPr txBox="1"/>
+          <p:nvPr/>
+        </p:nvSpPr>
+        <p:spPr>
+          <a:xfrm>
+            <a:off x="1866507" y="2867319"/>
+            <a:ext cx="810705" cy="1446550"/>
+          </a:xfrm>
+          <a:prstGeom prst="rect">
+            <a:avLst/>
+          </a:prstGeom>
+          <a:noFill/>
+        </p:spPr>
+        <p:txBody>
+          <a:bodyPr wrap="square" rtlCol="0">
+            <a:spAutoFit/>
+          </a:bodyPr>
+          <a:lstStyle/>
+          <a:p>
+            <a:r>
+              <a:rPr lang="fr-FR" sz="8800" b="1" dirty="0"/>
+              <a:t>2</a:t>
+            </a:r>
+          </a:p>
+        </p:txBody>
+      </p:sp>
+      <p:sp>
+        <p:nvSpPr>
+          <p:cNvPr id="12" name="Flèche : droite 11">
+            <a:extLst>
+              <a:ext uri="{FF2B5EF4-FFF2-40B4-BE49-F238E27FC236}">
+                <a16:creationId xmlns:a16="http://schemas.microsoft.com/office/drawing/2014/main" id="{EAC2EF95-83AE-CF79-8FB5-58DAB073F71D}"/>
+              </a:ext>
+            </a:extLst>
+          </p:cNvPr>
+          <p:cNvSpPr/>
+          <p:nvPr/>
+        </p:nvSpPr>
+        <p:spPr>
+          <a:xfrm>
+            <a:off x="2601797" y="3288936"/>
+            <a:ext cx="810705" cy="603316"/>
+          </a:xfrm>
+          <a:prstGeom prst="rightArrow">
+            <a:avLst/>
+          </a:prstGeom>
+        </p:spPr>
+        <p:style>
+          <a:lnRef idx="2">
+            <a:schemeClr val="accent1">
+              <a:shade val="15000"/>
+            </a:schemeClr>
+          </a:lnRef>
+          <a:fillRef idx="1">
+            <a:schemeClr val="accent1"/>
+          </a:fillRef>
+          <a:effectRef idx="0">
+            <a:schemeClr val="accent1"/>
+          </a:effectRef>
+          <a:fontRef idx="minor">
+            <a:schemeClr val="lt1"/>
+          </a:fontRef>
+        </p:style>
+        <p:txBody>
+          <a:bodyPr rtlCol="0" anchor="ctr"/>
+          <a:lstStyle/>
+          <a:p>
+            <a:pPr algn="ctr"/>
+            <a:endParaRPr lang="fr-FR"/>
+          </a:p>
+        </p:txBody>
+      </p:sp>
+      <p:sp>
+        <p:nvSpPr>
+          <p:cNvPr id="14" name="ZoneTexte 13">
+            <a:extLst>
+              <a:ext uri="{FF2B5EF4-FFF2-40B4-BE49-F238E27FC236}">
+                <a16:creationId xmlns:a16="http://schemas.microsoft.com/office/drawing/2014/main" id="{7CC03A06-F2C4-F4AB-224D-27CEF45A480A}"/>
+              </a:ext>
+            </a:extLst>
+          </p:cNvPr>
+          <p:cNvSpPr txBox="1"/>
+          <p:nvPr/>
+        </p:nvSpPr>
+        <p:spPr>
+          <a:xfrm>
+            <a:off x="6675748" y="2867319"/>
+            <a:ext cx="810705" cy="1446550"/>
+          </a:xfrm>
+          <a:prstGeom prst="rect">
+            <a:avLst/>
+          </a:prstGeom>
+          <a:noFill/>
+        </p:spPr>
+        <p:txBody>
+          <a:bodyPr wrap="square" rtlCol="0">
+            <a:spAutoFit/>
+          </a:bodyPr>
+          <a:lstStyle/>
+          <a:p>
+            <a:r>
+              <a:rPr lang="fr-FR" sz="8800" b="1" dirty="0"/>
+              <a:t>2</a:t>
+            </a:r>
+          </a:p>
+        </p:txBody>
+      </p:sp>
+      <p:sp>
+        <p:nvSpPr>
+          <p:cNvPr id="16" name="Flèche : droite 15">
+            <a:extLst>
+              <a:ext uri="{FF2B5EF4-FFF2-40B4-BE49-F238E27FC236}">
+                <a16:creationId xmlns:a16="http://schemas.microsoft.com/office/drawing/2014/main" id="{3389148A-D8AD-F71C-DD74-D75EFD9E28CF}"/>
+              </a:ext>
+            </a:extLst>
+          </p:cNvPr>
+          <p:cNvSpPr/>
+          <p:nvPr/>
+        </p:nvSpPr>
+        <p:spPr>
+          <a:xfrm>
+            <a:off x="5968737" y="3288936"/>
+            <a:ext cx="810705" cy="603316"/>
+          </a:xfrm>
+          <a:prstGeom prst="rightArrow">
+            <a:avLst/>
+          </a:prstGeom>
+        </p:spPr>
+        <p:style>
+          <a:lnRef idx="2">
+            <a:schemeClr val="accent1">
+              <a:shade val="15000"/>
+            </a:schemeClr>
+          </a:lnRef>
+          <a:fillRef idx="1">
+            <a:schemeClr val="accent1"/>
+          </a:fillRef>
+          <a:effectRef idx="0">
+            <a:schemeClr val="accent1"/>
+          </a:effectRef>
+          <a:fontRef idx="minor">
+            <a:schemeClr val="lt1"/>
+          </a:fontRef>
+        </p:style>
+        <p:txBody>
+          <a:bodyPr rtlCol="0" anchor="ctr"/>
+          <a:lstStyle/>
+          <a:p>
+            <a:pPr algn="ctr"/>
+            <a:endParaRPr lang="fr-FR"/>
+          </a:p>
+        </p:txBody>
+      </p:sp>
+    </p:spTree>
+    <p:extLst>
+      <p:ext uri="{BB962C8B-B14F-4D97-AF65-F5344CB8AC3E}">
+        <p14:creationId xmlns:p14="http://schemas.microsoft.com/office/powerpoint/2010/main" val="1400368169"/>
       </p:ext>
     </p:extLst>
   </p:cSld>
